--- a/Task4 Corrections.pptx
+++ b/Task4 Corrections.pptx
@@ -10,9 +10,10 @@
     <p:sldId id="258" r:id="rId4"/>
     <p:sldId id="259" r:id="rId5"/>
     <p:sldId id="260" r:id="rId6"/>
+    <p:sldId id="261" r:id="rId7"/>
   </p:sldIdLst>
   <p:notesMasterIdLst>
-    <p:notesMasterId r:id="rId7"/>
+    <p:notesMasterId r:id="rId8"/>
   </p:notesMasterIdLst>
   <p:sldSz cx="12192000" cy="6858000"/>
   <p:notesSz cx="6858000" cy="12192000"/>
@@ -1272,6 +1273,94 @@
             <a:fld id="{F7021451-1387-4CA6-816F-3879F97B5CBC}" type="slidenum">
               <a:rPr lang="en-US"/>
               <a:t>5</a:t>
+            </a:fld>
+            <a:endParaRPr lang="en-US"/>
+          </a:p>
+        </p:txBody>
+      </p:sp>
+    </p:spTree>
+    <p:extLst>
+      <p:ext uri="{BB962C8B-B14F-4D97-AF65-F5344CB8AC3E}">
+        <p14:creationId xmlns:p14="http://schemas.microsoft.com/office/powerpoint/2010/main" val="1024086991"/>
+      </p:ext>
+    </p:extLst>
+  </p:cSld>
+  <p:clrMapOvr>
+    <a:masterClrMapping/>
+  </p:clrMapOvr>
+</p:notes>
+</file>
+
+<file path=ppt/notesSlides/notesSlide6.xml><?xml version="1.0" encoding="utf-8"?>
+<p:notes xmlns:a="http://schemas.openxmlformats.org/drawingml/2006/main" xmlns:r="http://schemas.openxmlformats.org/officeDocument/2006/relationships" xmlns:p="http://schemas.openxmlformats.org/presentationml/2006/main">
+  <p:cSld>
+    <p:spTree>
+      <p:nvGrpSpPr>
+        <p:cNvPr id="1" name=""/>
+        <p:cNvGrpSpPr/>
+        <p:nvPr/>
+      </p:nvGrpSpPr>
+      <p:grpSpPr>
+        <a:xfrm>
+          <a:off x="0" y="0"/>
+          <a:ext cx="0" cy="0"/>
+          <a:chOff x="0" y="0"/>
+          <a:chExt cx="0" cy="0"/>
+        </a:xfrm>
+      </p:grpSpPr>
+      <p:sp>
+        <p:nvSpPr>
+          <p:cNvPr id="2" name="Slide Image Placeholder 1"/>
+          <p:cNvSpPr>
+            <a:spLocks noGrp="1" noRot="1" noChangeAspect="1"/>
+          </p:cNvSpPr>
+          <p:nvPr>
+            <p:ph type="sldImg"/>
+          </p:nvPr>
+        </p:nvSpPr>
+        <p:spPr/>
+      </p:sp>
+      <p:sp>
+        <p:nvSpPr>
+          <p:cNvPr id="3" name="Notes Placeholder 2"/>
+          <p:cNvSpPr>
+            <a:spLocks noGrp="1"/>
+          </p:cNvSpPr>
+          <p:nvPr>
+            <p:ph type="body" idx="1"/>
+          </p:nvPr>
+        </p:nvSpPr>
+        <p:spPr/>
+        <p:txBody>
+          <a:bodyPr/>
+          <a:lstStyle/>
+          <a:p>
+            <a:r>
+              <a:rPr lang="en-US" dirty="0"/>
+              <a:t/>
+            </a:r>
+            <a:endParaRPr lang="en-US" dirty="0"/>
+          </a:p>
+        </p:txBody>
+      </p:sp>
+      <p:sp>
+        <p:nvSpPr>
+          <p:cNvPr id="4" name="Slide Number Placeholder 3"/>
+          <p:cNvSpPr>
+            <a:spLocks noGrp="1"/>
+          </p:cNvSpPr>
+          <p:nvPr>
+            <p:ph type="sldNum" sz="quarter" idx="10"/>
+          </p:nvPr>
+        </p:nvSpPr>
+        <p:spPr/>
+        <p:txBody>
+          <a:bodyPr/>
+          <a:lstStyle/>
+          <a:p>
+            <a:fld id="{F7021451-1387-4CA6-816F-3879F97B5CBC}" type="slidenum">
+              <a:rPr lang="en-US"/>
+              <a:t>6</a:t>
             </a:fld>
             <a:endParaRPr lang="en-US"/>
           </a:p>
@@ -2852,7 +2941,7 @@
                 <a:ea typeface="Calibri" pitchFamily="34" charset="-122"/>
                 <a:cs typeface="Calibri" pitchFamily="34" charset="-120"/>
               </a:rPr>
-              <a:t>VALIDATION</a:t>
+              <a:t>SUMMARY</a:t>
             </a:r>
             <a:endParaRPr lang="en-US" sz="1200" dirty="0"/>
           </a:p>
@@ -2891,78 +2980,26 @@
                 <a:ea typeface="Calibri" pitchFamily="34" charset="-122"/>
                 <a:cs typeface="Calibri" pitchFamily="34" charset="-120"/>
               </a:rPr>
-              <a:t>Corrections Hold Up Against the Data</a:t>
+              <a:t>Key Findings at a Glance</a:t>
             </a:r>
             <a:endParaRPr lang="en-US" sz="2800" dirty="0"/>
           </a:p>
         </p:txBody>
       </p:sp>
-      <p:graphicFrame>
-        <p:nvGraphicFramePr>
-          <p:cNvPr id="4" name="Chart 0" descr=""/>
-          <p:cNvGraphicFramePr/>
-          <p:nvPr/>
-        </p:nvGraphicFramePr>
-        <p:xfrm>
-          <a:off x="548640" y="1417320"/>
-          <a:ext cx="5577840" cy="3200400"/>
-        </p:xfrm>
-        <a:graphic xmlns:a="http://schemas.openxmlformats.org/drawingml/2006/main">
-          <a:graphicData uri="http://schemas.openxmlformats.org/drawingml/2006/chart">
-            <c:chart xmlns:c="http://schemas.openxmlformats.org/drawingml/2006/chart" r:id="rId1"/>
-          </a:graphicData>
-        </a:graphic>
-      </p:graphicFrame>
-      <p:sp>
-        <p:nvSpPr>
-          <p:cNvPr id="5" name="Text 2"/>
-          <p:cNvSpPr/>
-          <p:nvPr/>
-        </p:nvSpPr>
-        <p:spPr>
-          <a:xfrm>
-            <a:off x="548640" y="4754880"/>
-            <a:ext cx="5577840" cy="822960"/>
-          </a:xfrm>
-          <a:prstGeom prst="rect">
-            <a:avLst/>
-          </a:prstGeom>
-          <a:noFill/>
-          <a:ln/>
-        </p:spPr>
-        <p:txBody>
-          <a:bodyPr wrap="square" rtlCol="0" anchor="ctr"/>
-          <a:lstStyle/>
-          <a:p>
-            <a:pPr indent="0" marL="0">
-              <a:buNone/>
-            </a:pPr>
-            <a:r>
-              <a:rPr lang="en-US" sz="1150" i="1" dirty="0">
-                <a:solidFill>
-                  <a:srgbClr val="444444"/>
-                </a:solidFill>
-              </a:rPr>
-              <a:t>~33–38% of past-due records were coming from inactive, pre-flow, or non-Texas-residential accounts — filtered out consistently across every day tested.</a:t>
-            </a:r>
-            <a:endParaRPr lang="en-US" sz="1150" dirty="0"/>
-          </a:p>
-        </p:txBody>
-      </p:sp>
-      <p:sp>
-        <p:nvSpPr>
-          <p:cNvPr id="6" name="Shape 3"/>
-          <p:cNvSpPr/>
-          <p:nvPr/>
-        </p:nvSpPr>
-        <p:spPr>
-          <a:xfrm>
-            <a:off x="6400800" y="1417320"/>
-            <a:ext cx="5212080" cy="1600200"/>
+      <p:sp>
+        <p:nvSpPr>
+          <p:cNvPr id="4" name="Shape 2"/>
+          <p:cNvSpPr/>
+          <p:nvPr/>
+        </p:nvSpPr>
+        <p:spPr>
+          <a:xfrm>
+            <a:off x="548640" y="1554480"/>
+            <a:ext cx="11064240" cy="841248"/>
           </a:xfrm>
           <a:prstGeom prst="roundRect">
             <a:avLst>
-              <a:gd name="adj" fmla="val 4571"/>
+              <a:gd name="adj" fmla="val 7609"/>
             </a:avLst>
           </a:prstGeom>
           <a:solidFill>
@@ -2978,14 +3015,14 @@
       </p:sp>
       <p:sp>
         <p:nvSpPr>
-          <p:cNvPr id="7" name="Text 4"/>
-          <p:cNvSpPr/>
-          <p:nvPr/>
-        </p:nvSpPr>
-        <p:spPr>
-          <a:xfrm>
-            <a:off x="6675120" y="1572768"/>
-            <a:ext cx="4663440" cy="320040"/>
+          <p:cNvPr id="5" name="Text 3"/>
+          <p:cNvSpPr/>
+          <p:nvPr/>
+        </p:nvSpPr>
+        <p:spPr>
+          <a:xfrm>
+            <a:off x="822960" y="1645920"/>
+            <a:ext cx="2743200" cy="658368"/>
           </a:xfrm>
           <a:prstGeom prst="rect">
             <a:avLst/>
@@ -3001,27 +3038,50 @@
               <a:buNone/>
             </a:pPr>
             <a:r>
-              <a:rPr lang="en-US" sz="1400" b="1" dirty="0">
+              <a:rPr lang="en-US" sz="1350" b="1" dirty="0">
                 <a:solidFill>
                   <a:srgbClr val="1A3A5C"/>
                 </a:solidFill>
               </a:rPr>
-              <a:t>Containment Rate</a:t>
-            </a:r>
-            <a:endParaRPr lang="en-US" sz="1400" dirty="0"/>
-          </a:p>
-        </p:txBody>
-      </p:sp>
-      <p:sp>
-        <p:nvSpPr>
-          <p:cNvPr id="8" name="Text 5"/>
-          <p:cNvSpPr/>
-          <p:nvPr/>
-        </p:nvSpPr>
-        <p:spPr>
-          <a:xfrm>
-            <a:off x="6675120" y="1920240"/>
-            <a:ext cx="4663440" cy="1005840"/>
+              <a:t>Past-due filter</a:t>
+            </a:r>
+            <a:endParaRPr lang="en-US" sz="1350" dirty="0"/>
+          </a:p>
+        </p:txBody>
+      </p:sp>
+      <p:sp>
+        <p:nvSpPr>
+          <p:cNvPr id="6" name="Shape 4"/>
+          <p:cNvSpPr/>
+          <p:nvPr/>
+        </p:nvSpPr>
+        <p:spPr>
+          <a:xfrm>
+            <a:off x="3749040" y="1664208"/>
+            <a:ext cx="0" cy="621792"/>
+          </a:xfrm>
+          <a:prstGeom prst="line">
+            <a:avLst/>
+          </a:prstGeom>
+          <a:noFill/>
+          <a:ln w="12700">
+            <a:solidFill>
+              <a:srgbClr val="D0D5D9"/>
+            </a:solidFill>
+            <a:prstDash val="solid"/>
+          </a:ln>
+        </p:spPr>
+      </p:sp>
+      <p:sp>
+        <p:nvSpPr>
+          <p:cNvPr id="7" name="Text 5"/>
+          <p:cNvSpPr/>
+          <p:nvPr/>
+        </p:nvSpPr>
+        <p:spPr>
+          <a:xfrm>
+            <a:off x="3977640" y="1645920"/>
+            <a:ext cx="7452360" cy="658368"/>
           </a:xfrm>
           <a:prstGeom prst="rect">
             <a:avLst/>
@@ -3037,31 +3097,31 @@
               <a:buNone/>
             </a:pPr>
             <a:r>
-              <a:rPr lang="en-US" sz="1100" dirty="0">
+              <a:rPr lang="en-US" sz="1200" dirty="0">
                 <a:solidFill>
                   <a:srgbClr val="444444"/>
                 </a:solidFill>
               </a:rPr>
-              <a:t>Sundays show 100% containment — consistent with no live agents staffed that day. Rebuilt using verified-status + queue-time logic, per Jonathan's definition.</a:t>
-            </a:r>
-            <a:endParaRPr lang="en-US" sz="1100" dirty="0"/>
-          </a:p>
-        </p:txBody>
-      </p:sp>
-      <p:sp>
-        <p:nvSpPr>
-          <p:cNvPr id="9" name="Shape 6"/>
-          <p:cNvSpPr/>
-          <p:nvPr/>
-        </p:nvSpPr>
-        <p:spPr>
-          <a:xfrm>
-            <a:off x="6400800" y="3200400"/>
-            <a:ext cx="5212080" cy="1600200"/>
+              <a:t>Removes 33–38% of past-due records daily — inactive, pre-flow, or non-Texas-residential accounts were inflating the original count.</a:t>
+            </a:r>
+            <a:endParaRPr lang="en-US" sz="1200" dirty="0"/>
+          </a:p>
+        </p:txBody>
+      </p:sp>
+      <p:sp>
+        <p:nvSpPr>
+          <p:cNvPr id="8" name="Shape 6"/>
+          <p:cNvSpPr/>
+          <p:nvPr/>
+        </p:nvSpPr>
+        <p:spPr>
+          <a:xfrm>
+            <a:off x="548640" y="2487168"/>
+            <a:ext cx="11064240" cy="841248"/>
           </a:xfrm>
           <a:prstGeom prst="roundRect">
             <a:avLst>
-              <a:gd name="adj" fmla="val 4571"/>
+              <a:gd name="adj" fmla="val 7609"/>
             </a:avLst>
           </a:prstGeom>
           <a:solidFill>
@@ -3077,14 +3137,14 @@
       </p:sp>
       <p:sp>
         <p:nvSpPr>
-          <p:cNvPr id="10" name="Text 7"/>
-          <p:cNvSpPr/>
-          <p:nvPr/>
-        </p:nvSpPr>
-        <p:spPr>
-          <a:xfrm>
-            <a:off x="6675120" y="3355848"/>
-            <a:ext cx="4663440" cy="320040"/>
+          <p:cNvPr id="9" name="Text 7"/>
+          <p:cNvSpPr/>
+          <p:nvPr/>
+        </p:nvSpPr>
+        <p:spPr>
+          <a:xfrm>
+            <a:off x="822960" y="2578608"/>
+            <a:ext cx="2743200" cy="658368"/>
           </a:xfrm>
           <a:prstGeom prst="rect">
             <a:avLst/>
@@ -3100,27 +3160,50 @@
               <a:buNone/>
             </a:pPr>
             <a:r>
-              <a:rPr lang="en-US" sz="1400" b="1" dirty="0">
+              <a:rPr lang="en-US" sz="1350" b="1" dirty="0">
                 <a:solidFill>
                   <a:srgbClr val="1A3A5C"/>
                 </a:solidFill>
               </a:rPr>
-              <a:t>Transfer Combining</a:t>
-            </a:r>
-            <a:endParaRPr lang="en-US" sz="1400" dirty="0"/>
-          </a:p>
-        </p:txBody>
-      </p:sp>
-      <p:sp>
-        <p:nvSpPr>
-          <p:cNvPr id="11" name="Text 8"/>
-          <p:cNvSpPr/>
-          <p:nvPr/>
-        </p:nvSpPr>
-        <p:spPr>
-          <a:xfrm>
-            <a:off x="6675120" y="3703320"/>
-            <a:ext cx="4663440" cy="1005840"/>
+              <a:t>Containment rate</a:t>
+            </a:r>
+            <a:endParaRPr lang="en-US" sz="1350" dirty="0"/>
+          </a:p>
+        </p:txBody>
+      </p:sp>
+      <p:sp>
+        <p:nvSpPr>
+          <p:cNvPr id="10" name="Shape 8"/>
+          <p:cNvSpPr/>
+          <p:nvPr/>
+        </p:nvSpPr>
+        <p:spPr>
+          <a:xfrm>
+            <a:off x="3749040" y="2596896"/>
+            <a:ext cx="0" cy="621792"/>
+          </a:xfrm>
+          <a:prstGeom prst="line">
+            <a:avLst/>
+          </a:prstGeom>
+          <a:noFill/>
+          <a:ln w="12700">
+            <a:solidFill>
+              <a:srgbClr val="D0D5D9"/>
+            </a:solidFill>
+            <a:prstDash val="solid"/>
+          </a:ln>
+        </p:spPr>
+      </p:sp>
+      <p:sp>
+        <p:nvSpPr>
+          <p:cNvPr id="11" name="Text 9"/>
+          <p:cNvSpPr/>
+          <p:nvPr/>
+        </p:nvSpPr>
+        <p:spPr>
+          <a:xfrm>
+            <a:off x="3977640" y="2578608"/>
+            <a:ext cx="7452360" cy="658368"/>
           </a:xfrm>
           <a:prstGeom prst="rect">
             <a:avLst/>
@@ -3136,49 +3219,54 @@
               <a:buNone/>
             </a:pPr>
             <a:r>
-              <a:rPr lang="en-US" sz="1100" dirty="0">
+              <a:rPr lang="en-US" sz="1200" dirty="0">
                 <a:solidFill>
                   <a:srgbClr val="444444"/>
                 </a:solidFill>
               </a:rPr>
-              <a:t>Combined total is consistently lower than Regular + Escalation summed — confirming calls transferred through both paths aren't double-counted. Sunday values correctly land at zero.</a:t>
-            </a:r>
-            <a:endParaRPr lang="en-US" sz="1100" dirty="0"/>
-          </a:p>
-        </p:txBody>
-      </p:sp>
-      <p:sp>
-        <p:nvSpPr>
-          <p:cNvPr id="12" name="Shape 9"/>
-          <p:cNvSpPr/>
-          <p:nvPr/>
-        </p:nvSpPr>
-        <p:spPr>
-          <a:xfrm>
-            <a:off x="6400800" y="4983480"/>
-            <a:ext cx="5212080" cy="868680"/>
+              <a:t>Sundays show 100% containment, consistent with no live agents staffed that day — rebuilt to Jonathan's real definition.</a:t>
+            </a:r>
+            <a:endParaRPr lang="en-US" sz="1200" dirty="0"/>
+          </a:p>
+        </p:txBody>
+      </p:sp>
+      <p:sp>
+        <p:nvSpPr>
+          <p:cNvPr id="12" name="Shape 10"/>
+          <p:cNvSpPr/>
+          <p:nvPr/>
+        </p:nvSpPr>
+        <p:spPr>
+          <a:xfrm>
+            <a:off x="548640" y="3419856"/>
+            <a:ext cx="11064240" cy="841248"/>
           </a:xfrm>
           <a:prstGeom prst="roundRect">
             <a:avLst>
-              <a:gd name="adj" fmla="val 8421"/>
+              <a:gd name="adj" fmla="val 7609"/>
             </a:avLst>
           </a:prstGeom>
           <a:solidFill>
-            <a:srgbClr val="EAF2EC"/>
+            <a:srgbClr val="F5F6F7"/>
           </a:solidFill>
-          <a:ln/>
-        </p:spPr>
-      </p:sp>
-      <p:sp>
-        <p:nvSpPr>
-          <p:cNvPr id="13" name="Text 10"/>
-          <p:cNvSpPr/>
-          <p:nvPr/>
-        </p:nvSpPr>
-        <p:spPr>
-          <a:xfrm>
-            <a:off x="6675120" y="5074920"/>
-            <a:ext cx="4663440" cy="685800"/>
+          <a:ln w="12700">
+            <a:solidFill>
+              <a:srgbClr val="E3E6E9"/>
+            </a:solidFill>
+            <a:prstDash val="solid"/>
+          </a:ln>
+        </p:spPr>
+      </p:sp>
+      <p:sp>
+        <p:nvSpPr>
+          <p:cNvPr id="13" name="Text 11"/>
+          <p:cNvSpPr/>
+          <p:nvPr/>
+        </p:nvSpPr>
+        <p:spPr>
+          <a:xfrm>
+            <a:off x="822960" y="3511296"/>
+            <a:ext cx="2743200" cy="658368"/>
           </a:xfrm>
           <a:prstGeom prst="rect">
             <a:avLst/>
@@ -3194,20 +3282,323 @@
               <a:buNone/>
             </a:pPr>
             <a:r>
-              <a:rPr lang="en-US" sz="1150" b="1" dirty="0">
-                <a:solidFill>
-                  <a:srgbClr val="3E8E5A"/>
-                </a:solidFill>
-              </a:rPr>
-              <a:t>No exceptions found in any daily comparison — both corrections are ready to feed the full forecasting rebuild.</a:t>
-            </a:r>
-            <a:endParaRPr lang="en-US" sz="1150" dirty="0"/>
-          </a:p>
-        </p:txBody>
-      </p:sp>
-      <p:sp>
-        <p:nvSpPr>
-          <p:cNvPr id="14" name="Text 11"/>
+              <a:rPr lang="en-US" sz="1350" b="1" dirty="0">
+                <a:solidFill>
+                  <a:srgbClr val="1A3A5C"/>
+                </a:solidFill>
+              </a:rPr>
+              <a:t>Texas/Alberta split</a:t>
+            </a:r>
+            <a:endParaRPr lang="en-US" sz="1350" dirty="0"/>
+          </a:p>
+        </p:txBody>
+      </p:sp>
+      <p:sp>
+        <p:nvSpPr>
+          <p:cNvPr id="14" name="Shape 12"/>
+          <p:cNvSpPr/>
+          <p:nvPr/>
+        </p:nvSpPr>
+        <p:spPr>
+          <a:xfrm>
+            <a:off x="3749040" y="3529584"/>
+            <a:ext cx="0" cy="621792"/>
+          </a:xfrm>
+          <a:prstGeom prst="line">
+            <a:avLst/>
+          </a:prstGeom>
+          <a:noFill/>
+          <a:ln w="12700">
+            <a:solidFill>
+              <a:srgbClr val="D0D5D9"/>
+            </a:solidFill>
+            <a:prstDash val="solid"/>
+          </a:ln>
+        </p:spPr>
+      </p:sp>
+      <p:sp>
+        <p:nvSpPr>
+          <p:cNvPr id="15" name="Text 13"/>
+          <p:cNvSpPr/>
+          <p:nvPr/>
+        </p:nvSpPr>
+        <p:spPr>
+          <a:xfrm>
+            <a:off x="3977640" y="3511296"/>
+            <a:ext cx="7452360" cy="658368"/>
+          </a:xfrm>
+          <a:prstGeom prst="rect">
+            <a:avLst/>
+          </a:prstGeom>
+          <a:noFill/>
+          <a:ln/>
+        </p:spPr>
+        <p:txBody>
+          <a:bodyPr wrap="square" rtlCol="0" anchor="ctr"/>
+          <a:lstStyle/>
+          <a:p>
+            <a:pPr indent="0" marL="0">
+              <a:buNone/>
+            </a:pPr>
+            <a:r>
+              <a:rPr lang="en-US" sz="1200" dirty="0">
+                <a:solidFill>
+                  <a:srgbClr val="444444"/>
+                </a:solidFill>
+              </a:rPr>
+              <a:t>Alberta queue data doesn't exist before March 2024 — a data-availability gap, not a market signal.</a:t>
+            </a:r>
+            <a:endParaRPr lang="en-US" sz="1200" dirty="0"/>
+          </a:p>
+        </p:txBody>
+      </p:sp>
+      <p:sp>
+        <p:nvSpPr>
+          <p:cNvPr id="16" name="Shape 14"/>
+          <p:cNvSpPr/>
+          <p:nvPr/>
+        </p:nvSpPr>
+        <p:spPr>
+          <a:xfrm>
+            <a:off x="548640" y="4352544"/>
+            <a:ext cx="11064240" cy="841248"/>
+          </a:xfrm>
+          <a:prstGeom prst="roundRect">
+            <a:avLst>
+              <a:gd name="adj" fmla="val 7609"/>
+            </a:avLst>
+          </a:prstGeom>
+          <a:solidFill>
+            <a:srgbClr val="F5F6F7"/>
+          </a:solidFill>
+          <a:ln w="12700">
+            <a:solidFill>
+              <a:srgbClr val="E3E6E9"/>
+            </a:solidFill>
+            <a:prstDash val="solid"/>
+          </a:ln>
+        </p:spPr>
+      </p:sp>
+      <p:sp>
+        <p:nvSpPr>
+          <p:cNvPr id="17" name="Text 15"/>
+          <p:cNvSpPr/>
+          <p:nvPr/>
+        </p:nvSpPr>
+        <p:spPr>
+          <a:xfrm>
+            <a:off x="822960" y="4443984"/>
+            <a:ext cx="2743200" cy="658368"/>
+          </a:xfrm>
+          <a:prstGeom prst="rect">
+            <a:avLst/>
+          </a:prstGeom>
+          <a:noFill/>
+          <a:ln/>
+        </p:spPr>
+        <p:txBody>
+          <a:bodyPr wrap="square" rtlCol="0" anchor="ctr"/>
+          <a:lstStyle/>
+          <a:p>
+            <a:pPr indent="0" marL="0">
+              <a:buNone/>
+            </a:pPr>
+            <a:r>
+              <a:rPr lang="en-US" sz="1350" b="1" dirty="0">
+                <a:solidFill>
+                  <a:srgbClr val="1A3A5C"/>
+                </a:solidFill>
+              </a:rPr>
+              <a:t>Transfer combining</a:t>
+            </a:r>
+            <a:endParaRPr lang="en-US" sz="1350" dirty="0"/>
+          </a:p>
+        </p:txBody>
+      </p:sp>
+      <p:sp>
+        <p:nvSpPr>
+          <p:cNvPr id="18" name="Shape 16"/>
+          <p:cNvSpPr/>
+          <p:nvPr/>
+        </p:nvSpPr>
+        <p:spPr>
+          <a:xfrm>
+            <a:off x="3749040" y="4462272"/>
+            <a:ext cx="0" cy="621792"/>
+          </a:xfrm>
+          <a:prstGeom prst="line">
+            <a:avLst/>
+          </a:prstGeom>
+          <a:noFill/>
+          <a:ln w="12700">
+            <a:solidFill>
+              <a:srgbClr val="D0D5D9"/>
+            </a:solidFill>
+            <a:prstDash val="solid"/>
+          </a:ln>
+        </p:spPr>
+      </p:sp>
+      <p:sp>
+        <p:nvSpPr>
+          <p:cNvPr id="19" name="Text 17"/>
+          <p:cNvSpPr/>
+          <p:nvPr/>
+        </p:nvSpPr>
+        <p:spPr>
+          <a:xfrm>
+            <a:off x="3977640" y="4443984"/>
+            <a:ext cx="7452360" cy="658368"/>
+          </a:xfrm>
+          <a:prstGeom prst="rect">
+            <a:avLst/>
+          </a:prstGeom>
+          <a:noFill/>
+          <a:ln/>
+        </p:spPr>
+        <p:txBody>
+          <a:bodyPr wrap="square" rtlCol="0" anchor="ctr"/>
+          <a:lstStyle/>
+          <a:p>
+            <a:pPr indent="0" marL="0">
+              <a:buNone/>
+            </a:pPr>
+            <a:r>
+              <a:rPr lang="en-US" sz="1200" dirty="0">
+                <a:solidFill>
+                  <a:srgbClr val="444444"/>
+                </a:solidFill>
+              </a:rPr>
+              <a:t>Combined total is always lower than Regular + Escalation summed — confirms no double-counting.</a:t>
+            </a:r>
+            <a:endParaRPr lang="en-US" sz="1200" dirty="0"/>
+          </a:p>
+        </p:txBody>
+      </p:sp>
+      <p:sp>
+        <p:nvSpPr>
+          <p:cNvPr id="20" name="Shape 18"/>
+          <p:cNvSpPr/>
+          <p:nvPr/>
+        </p:nvSpPr>
+        <p:spPr>
+          <a:xfrm>
+            <a:off x="548640" y="5285232"/>
+            <a:ext cx="11064240" cy="841248"/>
+          </a:xfrm>
+          <a:prstGeom prst="roundRect">
+            <a:avLst>
+              <a:gd name="adj" fmla="val 7609"/>
+            </a:avLst>
+          </a:prstGeom>
+          <a:solidFill>
+            <a:srgbClr val="F5F6F7"/>
+          </a:solidFill>
+          <a:ln w="12700">
+            <a:solidFill>
+              <a:srgbClr val="E3E6E9"/>
+            </a:solidFill>
+            <a:prstDash val="solid"/>
+          </a:ln>
+        </p:spPr>
+      </p:sp>
+      <p:sp>
+        <p:nvSpPr>
+          <p:cNvPr id="21" name="Text 19"/>
+          <p:cNvSpPr/>
+          <p:nvPr/>
+        </p:nvSpPr>
+        <p:spPr>
+          <a:xfrm>
+            <a:off x="822960" y="5376672"/>
+            <a:ext cx="2743200" cy="658368"/>
+          </a:xfrm>
+          <a:prstGeom prst="rect">
+            <a:avLst/>
+          </a:prstGeom>
+          <a:noFill/>
+          <a:ln/>
+        </p:spPr>
+        <p:txBody>
+          <a:bodyPr wrap="square" rtlCol="0" anchor="ctr"/>
+          <a:lstStyle/>
+          <a:p>
+            <a:pPr indent="0" marL="0">
+              <a:buNone/>
+            </a:pPr>
+            <a:r>
+              <a:rPr lang="en-US" sz="1350" b="1" dirty="0">
+                <a:solidFill>
+                  <a:srgbClr val="1A3A5C"/>
+                </a:solidFill>
+              </a:rPr>
+              <a:t>Language field</a:t>
+            </a:r>
+            <a:endParaRPr lang="en-US" sz="1350" dirty="0"/>
+          </a:p>
+        </p:txBody>
+      </p:sp>
+      <p:sp>
+        <p:nvSpPr>
+          <p:cNvPr id="22" name="Shape 20"/>
+          <p:cNvSpPr/>
+          <p:nvPr/>
+        </p:nvSpPr>
+        <p:spPr>
+          <a:xfrm>
+            <a:off x="3749040" y="5394960"/>
+            <a:ext cx="0" cy="621792"/>
+          </a:xfrm>
+          <a:prstGeom prst="line">
+            <a:avLst/>
+          </a:prstGeom>
+          <a:noFill/>
+          <a:ln w="12700">
+            <a:solidFill>
+              <a:srgbClr val="D0D5D9"/>
+            </a:solidFill>
+            <a:prstDash val="solid"/>
+          </a:ln>
+        </p:spPr>
+      </p:sp>
+      <p:sp>
+        <p:nvSpPr>
+          <p:cNvPr id="23" name="Text 21"/>
+          <p:cNvSpPr/>
+          <p:nvPr/>
+        </p:nvSpPr>
+        <p:spPr>
+          <a:xfrm>
+            <a:off x="3977640" y="5376672"/>
+            <a:ext cx="7452360" cy="658368"/>
+          </a:xfrm>
+          <a:prstGeom prst="rect">
+            <a:avLst/>
+          </a:prstGeom>
+          <a:noFill/>
+          <a:ln/>
+        </p:spPr>
+        <p:txBody>
+          <a:bodyPr wrap="square" rtlCol="0" anchor="ctr"/>
+          <a:lstStyle/>
+          <a:p>
+            <a:pPr indent="0" marL="0">
+              <a:buNone/>
+            </a:pPr>
+            <a:r>
+              <a:rPr lang="en-US" sz="1200" dirty="0">
+                <a:solidFill>
+                  <a:srgbClr val="444444"/>
+                </a:solidFill>
+              </a:rPr>
+              <a:t>Only ~28% of calls carry a reliable queue-based language tag; the remaining ~72% have no signal at all.</a:t>
+            </a:r>
+            <a:endParaRPr lang="en-US" sz="1200" dirty="0"/>
+          </a:p>
+        </p:txBody>
+      </p:sp>
+      <p:sp>
+        <p:nvSpPr>
+          <p:cNvPr id="24" name="Text 22"/>
           <p:cNvSpPr/>
           <p:nvPr/>
         </p:nvSpPr>
@@ -3243,7 +3634,7 @@
       </p:sp>
       <p:sp>
         <p:nvSpPr>
-          <p:cNvPr id="15" name="Text 12"/>
+          <p:cNvPr id="25" name="Text 23"/>
           <p:cNvSpPr/>
           <p:nvPr/>
         </p:nvSpPr>
@@ -3335,7 +3726,7 @@
                 <a:ea typeface="Calibri" pitchFamily="34" charset="-122"/>
                 <a:cs typeface="Calibri" pitchFamily="34" charset="-120"/>
               </a:rPr>
-              <a:t>DATA DISCOVERY</a:t>
+              <a:t>VALIDATION</a:t>
             </a:r>
             <a:endParaRPr lang="en-US" sz="1200" dirty="0"/>
           </a:p>
@@ -3374,22 +3765,38 @@
                 <a:ea typeface="Calibri" pitchFamily="34" charset="-122"/>
                 <a:cs typeface="Calibri" pitchFamily="34" charset="-120"/>
               </a:rPr>
-              <a:t>Alberta Queue Data Has a Timeline Gap</a:t>
+              <a:t>Corrections Hold Up Against the Data</a:t>
             </a:r>
             <a:endParaRPr lang="en-US" sz="2800" dirty="0"/>
           </a:p>
         </p:txBody>
       </p:sp>
-      <p:sp>
-        <p:nvSpPr>
-          <p:cNvPr id="4" name="Text 2"/>
-          <p:cNvSpPr/>
-          <p:nvPr/>
-        </p:nvSpPr>
-        <p:spPr>
-          <a:xfrm>
-            <a:off x="548640" y="1417320"/>
-            <a:ext cx="10789920" cy="365760"/>
+      <p:graphicFrame>
+        <p:nvGraphicFramePr>
+          <p:cNvPr id="4" name="Chart 0" descr=""/>
+          <p:cNvGraphicFramePr/>
+          <p:nvPr/>
+        </p:nvGraphicFramePr>
+        <p:xfrm>
+          <a:off x="548640" y="1417320"/>
+          <a:ext cx="5577840" cy="3200400"/>
+        </p:xfrm>
+        <a:graphic xmlns:a="http://schemas.openxmlformats.org/drawingml/2006/main">
+          <a:graphicData uri="http://schemas.openxmlformats.org/drawingml/2006/chart">
+            <c:chart xmlns:c="http://schemas.openxmlformats.org/drawingml/2006/chart" r:id="rId1"/>
+          </a:graphicData>
+        </a:graphic>
+      </p:graphicFrame>
+      <p:sp>
+        <p:nvSpPr>
+          <p:cNvPr id="5" name="Text 2"/>
+          <p:cNvSpPr/>
+          <p:nvPr/>
+        </p:nvSpPr>
+        <p:spPr>
+          <a:xfrm>
+            <a:off x="548640" y="4754880"/>
+            <a:ext cx="5577840" cy="822960"/>
           </a:xfrm>
           <a:prstGeom prst="rect">
             <a:avLst/>
@@ -3405,416 +3812,31 @@
               <a:buNone/>
             </a:pPr>
             <a:r>
-              <a:rPr lang="en-US" sz="1300" dirty="0">
+              <a:rPr lang="en-US" sz="1150" i="1" dirty="0">
                 <a:solidFill>
                   <a:srgbClr val="444444"/>
                 </a:solidFill>
               </a:rPr>
-              <a:t>Investigating the Texas/Alberta split surfaced a data-availability issue, not a query bug:</a:t>
-            </a:r>
-            <a:endParaRPr lang="en-US" sz="1300" dirty="0"/>
-          </a:p>
-        </p:txBody>
-      </p:sp>
-      <p:sp>
-        <p:nvSpPr>
-          <p:cNvPr id="5" name="Shape 3"/>
-          <p:cNvSpPr/>
-          <p:nvPr/>
-        </p:nvSpPr>
-        <p:spPr>
-          <a:xfrm>
-            <a:off x="914400" y="2286000"/>
-            <a:ext cx="9875520" cy="0"/>
-          </a:xfrm>
-          <a:prstGeom prst="line">
-            <a:avLst/>
-          </a:prstGeom>
-          <a:noFill/>
-          <a:ln w="38100">
-            <a:solidFill>
-              <a:srgbClr val="D0D5D9"/>
-            </a:solidFill>
-            <a:prstDash val="solid"/>
-          </a:ln>
-        </p:spPr>
-      </p:sp>
-      <p:sp>
-        <p:nvSpPr>
-          <p:cNvPr id="6" name="Shape 4"/>
-          <p:cNvSpPr/>
-          <p:nvPr/>
-        </p:nvSpPr>
-        <p:spPr>
-          <a:xfrm>
-            <a:off x="832104" y="2203704"/>
-            <a:ext cx="164592" cy="164592"/>
-          </a:xfrm>
-          <a:prstGeom prst="ellipse">
-            <a:avLst/>
-          </a:prstGeom>
-          <a:solidFill>
-            <a:srgbClr val="B0B7BD"/>
-          </a:solidFill>
-          <a:ln/>
-        </p:spPr>
-      </p:sp>
-      <p:sp>
-        <p:nvSpPr>
-          <p:cNvPr id="7" name="Text 5"/>
-          <p:cNvSpPr/>
-          <p:nvPr/>
-        </p:nvSpPr>
-        <p:spPr>
-          <a:xfrm>
-            <a:off x="91440" y="2423160"/>
-            <a:ext cx="1645920" cy="274320"/>
-          </a:xfrm>
-          <a:prstGeom prst="rect">
-            <a:avLst/>
-          </a:prstGeom>
-          <a:noFill/>
-          <a:ln/>
-        </p:spPr>
-        <p:txBody>
-          <a:bodyPr wrap="square" rtlCol="0" anchor="ctr"/>
-          <a:lstStyle/>
-          <a:p>
-            <a:pPr algn="ctr" indent="0" marL="0">
-              <a:buNone/>
-            </a:pPr>
-            <a:r>
-              <a:rPr lang="en-US" sz="1200" b="1" dirty="0">
-                <a:solidFill>
-                  <a:srgbClr val="1A3A5C"/>
-                </a:solidFill>
-              </a:rPr>
-              <a:t>Jul 2022</a:t>
-            </a:r>
-            <a:endParaRPr lang="en-US" sz="1200" dirty="0"/>
-          </a:p>
-        </p:txBody>
-      </p:sp>
-      <p:sp>
-        <p:nvSpPr>
-          <p:cNvPr id="8" name="Text 6"/>
-          <p:cNvSpPr/>
-          <p:nvPr/>
-        </p:nvSpPr>
-        <p:spPr>
-          <a:xfrm>
-            <a:off x="91440" y="2724912"/>
-            <a:ext cx="1645920" cy="548640"/>
-          </a:xfrm>
-          <a:prstGeom prst="rect">
-            <a:avLst/>
-          </a:prstGeom>
-          <a:noFill/>
-          <a:ln/>
-        </p:spPr>
-        <p:txBody>
-          <a:bodyPr wrap="square" rtlCol="0" anchor="ctr"/>
-          <a:lstStyle/>
-          <a:p>
-            <a:pPr algn="ctr" indent="0" marL="0">
-              <a:buNone/>
-            </a:pPr>
-            <a:r>
-              <a:rPr lang="en-US" sz="1000" dirty="0">
-                <a:solidFill>
-                  <a:srgbClr val="444444"/>
-                </a:solidFill>
-              </a:rPr>
-              <a:t>Baseline dataset</a:t>
-            </a:r>
-            <a:endParaRPr lang="en-US" sz="1000" dirty="0"/>
-          </a:p>
-          <a:p>
-            <a:pPr algn="ctr" indent="0" marL="0">
-              <a:buNone/>
-            </a:pPr>
-            <a:r>
-              <a:rPr lang="en-US" sz="1000" dirty="0">
-                <a:solidFill>
-                  <a:srgbClr val="444444"/>
-                </a:solidFill>
-              </a:rPr>
-              <a:t>starts</a:t>
-            </a:r>
-            <a:endParaRPr lang="en-US" sz="1000" dirty="0"/>
-          </a:p>
-        </p:txBody>
-      </p:sp>
-      <p:sp>
-        <p:nvSpPr>
-          <p:cNvPr id="9" name="Shape 7"/>
-          <p:cNvSpPr/>
-          <p:nvPr/>
-        </p:nvSpPr>
-        <p:spPr>
-          <a:xfrm>
-            <a:off x="5769864" y="2203704"/>
-            <a:ext cx="164592" cy="164592"/>
-          </a:xfrm>
-          <a:prstGeom prst="ellipse">
-            <a:avLst/>
-          </a:prstGeom>
-          <a:solidFill>
-            <a:srgbClr val="3D8B8B"/>
-          </a:solidFill>
-          <a:ln/>
-        </p:spPr>
-      </p:sp>
-      <p:sp>
-        <p:nvSpPr>
-          <p:cNvPr id="10" name="Text 8"/>
-          <p:cNvSpPr/>
-          <p:nvPr/>
-        </p:nvSpPr>
-        <p:spPr>
-          <a:xfrm>
-            <a:off x="5029200" y="2423160"/>
-            <a:ext cx="1645920" cy="274320"/>
-          </a:xfrm>
-          <a:prstGeom prst="rect">
-            <a:avLst/>
-          </a:prstGeom>
-          <a:noFill/>
-          <a:ln/>
-        </p:spPr>
-        <p:txBody>
-          <a:bodyPr wrap="square" rtlCol="0" anchor="ctr"/>
-          <a:lstStyle/>
-          <a:p>
-            <a:pPr algn="ctr" indent="0" marL="0">
-              <a:buNone/>
-            </a:pPr>
-            <a:r>
-              <a:rPr lang="en-US" sz="1200" b="1" dirty="0">
-                <a:solidFill>
-                  <a:srgbClr val="1A3A5C"/>
-                </a:solidFill>
-              </a:rPr>
-              <a:t>Mar 2024</a:t>
-            </a:r>
-            <a:endParaRPr lang="en-US" sz="1200" dirty="0"/>
-          </a:p>
-        </p:txBody>
-      </p:sp>
-      <p:sp>
-        <p:nvSpPr>
-          <p:cNvPr id="11" name="Text 9"/>
-          <p:cNvSpPr/>
-          <p:nvPr/>
-        </p:nvSpPr>
-        <p:spPr>
-          <a:xfrm>
-            <a:off x="5029200" y="2724912"/>
-            <a:ext cx="1645920" cy="548640"/>
-          </a:xfrm>
-          <a:prstGeom prst="rect">
-            <a:avLst/>
-          </a:prstGeom>
-          <a:noFill/>
-          <a:ln/>
-        </p:spPr>
-        <p:txBody>
-          <a:bodyPr wrap="square" rtlCol="0" anchor="ctr"/>
-          <a:lstStyle/>
-          <a:p>
-            <a:pPr algn="ctr" indent="0" marL="0">
-              <a:buNone/>
-            </a:pPr>
-            <a:r>
-              <a:rPr lang="en-US" sz="1000" dirty="0">
-                <a:solidFill>
-                  <a:srgbClr val="444444"/>
-                </a:solidFill>
-              </a:rPr>
-              <a:t>Alberta billing</a:t>
-            </a:r>
-            <a:endParaRPr lang="en-US" sz="1000" dirty="0"/>
-          </a:p>
-          <a:p>
-            <a:pPr algn="ctr" indent="0" marL="0">
-              <a:buNone/>
-            </a:pPr>
-            <a:r>
-              <a:rPr lang="en-US" sz="1000" dirty="0">
-                <a:solidFill>
-                  <a:srgbClr val="444444"/>
-                </a:solidFill>
-              </a:rPr>
-              <a:t>queues go live</a:t>
-            </a:r>
-            <a:endParaRPr lang="en-US" sz="1000" dirty="0"/>
-          </a:p>
-        </p:txBody>
-      </p:sp>
-      <p:sp>
-        <p:nvSpPr>
-          <p:cNvPr id="12" name="Shape 10"/>
-          <p:cNvSpPr/>
-          <p:nvPr/>
-        </p:nvSpPr>
-        <p:spPr>
-          <a:xfrm>
-            <a:off x="10707624" y="2203704"/>
-            <a:ext cx="164592" cy="164592"/>
-          </a:xfrm>
-          <a:prstGeom prst="ellipse">
-            <a:avLst/>
-          </a:prstGeom>
-          <a:solidFill>
-            <a:srgbClr val="1A3A5C"/>
-          </a:solidFill>
-          <a:ln/>
-        </p:spPr>
-      </p:sp>
-      <p:sp>
-        <p:nvSpPr>
-          <p:cNvPr id="13" name="Text 11"/>
-          <p:cNvSpPr/>
-          <p:nvPr/>
-        </p:nvSpPr>
-        <p:spPr>
-          <a:xfrm>
-            <a:off x="9966960" y="2423160"/>
-            <a:ext cx="1645920" cy="274320"/>
-          </a:xfrm>
-          <a:prstGeom prst="rect">
-            <a:avLst/>
-          </a:prstGeom>
-          <a:noFill/>
-          <a:ln/>
-        </p:spPr>
-        <p:txBody>
-          <a:bodyPr wrap="square" rtlCol="0" anchor="ctr"/>
-          <a:lstStyle/>
-          <a:p>
-            <a:pPr algn="ctr" indent="0" marL="0">
-              <a:buNone/>
-            </a:pPr>
-            <a:r>
-              <a:rPr lang="en-US" sz="1200" b="1" dirty="0">
-                <a:solidFill>
-                  <a:srgbClr val="1A3A5C"/>
-                </a:solidFill>
-              </a:rPr>
-              <a:t>Jul 2026</a:t>
-            </a:r>
-            <a:endParaRPr lang="en-US" sz="1200" dirty="0"/>
-          </a:p>
-        </p:txBody>
-      </p:sp>
-      <p:sp>
-        <p:nvSpPr>
-          <p:cNvPr id="14" name="Text 12"/>
-          <p:cNvSpPr/>
-          <p:nvPr/>
-        </p:nvSpPr>
-        <p:spPr>
-          <a:xfrm>
-            <a:off x="9966960" y="2724912"/>
-            <a:ext cx="1645920" cy="548640"/>
-          </a:xfrm>
-          <a:prstGeom prst="rect">
-            <a:avLst/>
-          </a:prstGeom>
-          <a:noFill/>
-          <a:ln/>
-        </p:spPr>
-        <p:txBody>
-          <a:bodyPr wrap="square" rtlCol="0" anchor="ctr"/>
-          <a:lstStyle/>
-          <a:p>
-            <a:pPr algn="ctr" indent="0" marL="0">
-              <a:buNone/>
-            </a:pPr>
-            <a:r>
-              <a:rPr lang="en-US" sz="1000" dirty="0">
-                <a:solidFill>
-                  <a:srgbClr val="444444"/>
-                </a:solidFill>
-              </a:rPr>
-              <a:t>Present</a:t>
-            </a:r>
-            <a:endParaRPr lang="en-US" sz="1000" dirty="0"/>
-          </a:p>
-        </p:txBody>
-      </p:sp>
-      <p:sp>
-        <p:nvSpPr>
-          <p:cNvPr id="15" name="Shape 13"/>
-          <p:cNvSpPr/>
-          <p:nvPr/>
-        </p:nvSpPr>
-        <p:spPr>
-          <a:xfrm>
-            <a:off x="914400" y="1783080"/>
-            <a:ext cx="4937760" cy="365760"/>
+              <a:t>~33–38% of past-due records were coming from inactive, pre-flow, or non-Texas-residential accounts — filtered out consistently across every day tested.</a:t>
+            </a:r>
+            <a:endParaRPr lang="en-US" sz="1150" dirty="0"/>
+          </a:p>
+        </p:txBody>
+      </p:sp>
+      <p:sp>
+        <p:nvSpPr>
+          <p:cNvPr id="6" name="Shape 3"/>
+          <p:cNvSpPr/>
+          <p:nvPr/>
+        </p:nvSpPr>
+        <p:spPr>
+          <a:xfrm>
+            <a:off x="6400800" y="1417320"/>
+            <a:ext cx="5212080" cy="1600200"/>
           </a:xfrm>
           <a:prstGeom prst="roundRect">
             <a:avLst>
-              <a:gd name="adj" fmla="val 10000"/>
-            </a:avLst>
-          </a:prstGeom>
-          <a:solidFill>
-            <a:srgbClr val="F0DDC7"/>
-          </a:solidFill>
-          <a:ln/>
-        </p:spPr>
-      </p:sp>
-      <p:sp>
-        <p:nvSpPr>
-          <p:cNvPr id="16" name="Text 14"/>
-          <p:cNvSpPr/>
-          <p:nvPr/>
-        </p:nvSpPr>
-        <p:spPr>
-          <a:xfrm>
-            <a:off x="914400" y="1801368"/>
-            <a:ext cx="4937760" cy="329184"/>
-          </a:xfrm>
-          <a:prstGeom prst="rect">
-            <a:avLst/>
-          </a:prstGeom>
-          <a:noFill/>
-          <a:ln/>
-        </p:spPr>
-        <p:txBody>
-          <a:bodyPr wrap="square" rtlCol="0" anchor="ctr"/>
-          <a:lstStyle/>
-          <a:p>
-            <a:pPr algn="ctr" indent="0" marL="0">
-              <a:buNone/>
-            </a:pPr>
-            <a:r>
-              <a:rPr lang="en-US" sz="1000" b="1" dirty="0">
-                <a:solidFill>
-                  <a:srgbClr val="B8860B"/>
-                </a:solidFill>
-              </a:rPr>
-              <a:t>No Alberta queue activity in this window</a:t>
-            </a:r>
-            <a:endParaRPr lang="en-US" sz="1000" dirty="0"/>
-          </a:p>
-        </p:txBody>
-      </p:sp>
-      <p:sp>
-        <p:nvSpPr>
-          <p:cNvPr id="17" name="Shape 15"/>
-          <p:cNvSpPr/>
-          <p:nvPr/>
-        </p:nvSpPr>
-        <p:spPr>
-          <a:xfrm>
-            <a:off x="548640" y="3749040"/>
-            <a:ext cx="10881360" cy="1417320"/>
-          </a:xfrm>
-          <a:prstGeom prst="roundRect">
-            <a:avLst>
-              <a:gd name="adj" fmla="val 5161"/>
+              <a:gd name="adj" fmla="val 4571"/>
             </a:avLst>
           </a:prstGeom>
           <a:solidFill>
@@ -3830,14 +3852,14 @@
       </p:sp>
       <p:sp>
         <p:nvSpPr>
-          <p:cNvPr id="18" name="Text 16"/>
-          <p:cNvSpPr/>
-          <p:nvPr/>
-        </p:nvSpPr>
-        <p:spPr>
-          <a:xfrm>
-            <a:off x="822960" y="3886200"/>
-            <a:ext cx="10332720" cy="320040"/>
+          <p:cNvPr id="7" name="Text 4"/>
+          <p:cNvSpPr/>
+          <p:nvPr/>
+        </p:nvSpPr>
+        <p:spPr>
+          <a:xfrm>
+            <a:off x="6675120" y="1572768"/>
+            <a:ext cx="4663440" cy="320040"/>
           </a:xfrm>
           <a:prstGeom prst="rect">
             <a:avLst/>
@@ -3853,27 +3875,27 @@
               <a:buNone/>
             </a:pPr>
             <a:r>
-              <a:rPr lang="en-US" sz="1350" b="1" dirty="0">
+              <a:rPr lang="en-US" sz="1400" b="1" dirty="0">
                 <a:solidFill>
                   <a:srgbClr val="1A3A5C"/>
                 </a:solidFill>
               </a:rPr>
-              <a:t>What this means for the dataset</a:t>
-            </a:r>
-            <a:endParaRPr lang="en-US" sz="1350" dirty="0"/>
-          </a:p>
-        </p:txBody>
-      </p:sp>
-      <p:sp>
-        <p:nvSpPr>
-          <p:cNvPr id="19" name="Text 17"/>
-          <p:cNvSpPr/>
-          <p:nvPr/>
-        </p:nvSpPr>
-        <p:spPr>
-          <a:xfrm>
-            <a:off x="822960" y="4206240"/>
-            <a:ext cx="10332720" cy="868680"/>
+              <a:t>Containment Rate</a:t>
+            </a:r>
+            <a:endParaRPr lang="en-US" sz="1400" dirty="0"/>
+          </a:p>
+        </p:txBody>
+      </p:sp>
+      <p:sp>
+        <p:nvSpPr>
+          <p:cNvPr id="8" name="Text 5"/>
+          <p:cNvSpPr/>
+          <p:nvPr/>
+        </p:nvSpPr>
+        <p:spPr>
+          <a:xfrm>
+            <a:off x="6675120" y="1920240"/>
+            <a:ext cx="4663440" cy="1005840"/>
           </a:xfrm>
           <a:prstGeom prst="rect">
             <a:avLst/>
@@ -3889,49 +3911,54 @@
               <a:buNone/>
             </a:pPr>
             <a:r>
-              <a:rPr lang="en-US" sz="1200" dirty="0">
+              <a:rPr lang="en-US" sz="1100" dirty="0">
                 <a:solidFill>
                   <a:srgbClr val="444444"/>
                 </a:solidFill>
               </a:rPr>
-              <a:t>Alberta shows zero Care calls from July 2022–March 2024 because the queue data doesn't exist yet — not because Alberta had no volume. The corrected query now carries an explicit AlbertaDataAvailability flag so this isn't mistaken for a real market signal.</a:t>
-            </a:r>
-            <a:endParaRPr lang="en-US" sz="1200" dirty="0"/>
-          </a:p>
-        </p:txBody>
-      </p:sp>
-      <p:sp>
-        <p:nvSpPr>
-          <p:cNvPr id="20" name="Shape 18"/>
-          <p:cNvSpPr/>
-          <p:nvPr/>
-        </p:nvSpPr>
-        <p:spPr>
-          <a:xfrm>
-            <a:off x="548640" y="5349240"/>
-            <a:ext cx="10881360" cy="914400"/>
+              <a:t>Sundays show 100% containment — consistent with no live agents staffed that day. Rebuilt using verified-status + queue-time logic, per Jonathan's definition.</a:t>
+            </a:r>
+            <a:endParaRPr lang="en-US" sz="1100" dirty="0"/>
+          </a:p>
+        </p:txBody>
+      </p:sp>
+      <p:sp>
+        <p:nvSpPr>
+          <p:cNvPr id="9" name="Shape 6"/>
+          <p:cNvSpPr/>
+          <p:nvPr/>
+        </p:nvSpPr>
+        <p:spPr>
+          <a:xfrm>
+            <a:off x="6400800" y="3200400"/>
+            <a:ext cx="5212080" cy="1600200"/>
           </a:xfrm>
           <a:prstGeom prst="roundRect">
             <a:avLst>
-              <a:gd name="adj" fmla="val 8000"/>
+              <a:gd name="adj" fmla="val 4571"/>
             </a:avLst>
           </a:prstGeom>
           <a:solidFill>
-            <a:srgbClr val="FCEFDD"/>
+            <a:srgbClr val="F5F6F7"/>
           </a:solidFill>
-          <a:ln/>
-        </p:spPr>
-      </p:sp>
-      <p:sp>
-        <p:nvSpPr>
-          <p:cNvPr id="21" name="Text 19"/>
-          <p:cNvSpPr/>
-          <p:nvPr/>
-        </p:nvSpPr>
-        <p:spPr>
-          <a:xfrm>
-            <a:off x="822960" y="5440680"/>
-            <a:ext cx="10332720" cy="731520"/>
+          <a:ln w="12700">
+            <a:solidFill>
+              <a:srgbClr val="E3E6E9"/>
+            </a:solidFill>
+            <a:prstDash val="solid"/>
+          </a:ln>
+        </p:spPr>
+      </p:sp>
+      <p:sp>
+        <p:nvSpPr>
+          <p:cNvPr id="10" name="Text 7"/>
+          <p:cNvSpPr/>
+          <p:nvPr/>
+        </p:nvSpPr>
+        <p:spPr>
+          <a:xfrm>
+            <a:off x="6675120" y="3355848"/>
+            <a:ext cx="4663440" cy="320040"/>
           </a:xfrm>
           <a:prstGeom prst="rect">
             <a:avLst/>
@@ -3947,20 +3974,114 @@
               <a:buNone/>
             </a:pPr>
             <a:r>
-              <a:rPr lang="en-US" sz="1200" b="1" dirty="0">
-                <a:solidFill>
-                  <a:srgbClr val="B8860B"/>
-                </a:solidFill>
-              </a:rPr>
-              <a:t>Open question for Jonathan: was Alberta a new market/product launch in 2024, or did it exist earlier under a different queue naming convention this table doesn't capture?</a:t>
-            </a:r>
-            <a:endParaRPr lang="en-US" sz="1200" dirty="0"/>
-          </a:p>
-        </p:txBody>
-      </p:sp>
-      <p:sp>
-        <p:nvSpPr>
-          <p:cNvPr id="22" name="Text 20"/>
+              <a:rPr lang="en-US" sz="1400" b="1" dirty="0">
+                <a:solidFill>
+                  <a:srgbClr val="1A3A5C"/>
+                </a:solidFill>
+              </a:rPr>
+              <a:t>Transfer Combining</a:t>
+            </a:r>
+            <a:endParaRPr lang="en-US" sz="1400" dirty="0"/>
+          </a:p>
+        </p:txBody>
+      </p:sp>
+      <p:sp>
+        <p:nvSpPr>
+          <p:cNvPr id="11" name="Text 8"/>
+          <p:cNvSpPr/>
+          <p:nvPr/>
+        </p:nvSpPr>
+        <p:spPr>
+          <a:xfrm>
+            <a:off x="6675120" y="3703320"/>
+            <a:ext cx="4663440" cy="1005840"/>
+          </a:xfrm>
+          <a:prstGeom prst="rect">
+            <a:avLst/>
+          </a:prstGeom>
+          <a:noFill/>
+          <a:ln/>
+        </p:spPr>
+        <p:txBody>
+          <a:bodyPr wrap="square" rtlCol="0" anchor="ctr"/>
+          <a:lstStyle/>
+          <a:p>
+            <a:pPr indent="0" marL="0">
+              <a:buNone/>
+            </a:pPr>
+            <a:r>
+              <a:rPr lang="en-US" sz="1100" dirty="0">
+                <a:solidFill>
+                  <a:srgbClr val="444444"/>
+                </a:solidFill>
+              </a:rPr>
+              <a:t>Combined total is consistently lower than Regular + Escalation summed — confirming calls transferred through both paths aren't double-counted. Sunday values correctly land at zero.</a:t>
+            </a:r>
+            <a:endParaRPr lang="en-US" sz="1100" dirty="0"/>
+          </a:p>
+        </p:txBody>
+      </p:sp>
+      <p:sp>
+        <p:nvSpPr>
+          <p:cNvPr id="12" name="Shape 9"/>
+          <p:cNvSpPr/>
+          <p:nvPr/>
+        </p:nvSpPr>
+        <p:spPr>
+          <a:xfrm>
+            <a:off x="6400800" y="4983480"/>
+            <a:ext cx="5212080" cy="868680"/>
+          </a:xfrm>
+          <a:prstGeom prst="roundRect">
+            <a:avLst>
+              <a:gd name="adj" fmla="val 8421"/>
+            </a:avLst>
+          </a:prstGeom>
+          <a:solidFill>
+            <a:srgbClr val="EAF2EC"/>
+          </a:solidFill>
+          <a:ln/>
+        </p:spPr>
+      </p:sp>
+      <p:sp>
+        <p:nvSpPr>
+          <p:cNvPr id="13" name="Text 10"/>
+          <p:cNvSpPr/>
+          <p:nvPr/>
+        </p:nvSpPr>
+        <p:spPr>
+          <a:xfrm>
+            <a:off x="6675120" y="5074920"/>
+            <a:ext cx="4663440" cy="685800"/>
+          </a:xfrm>
+          <a:prstGeom prst="rect">
+            <a:avLst/>
+          </a:prstGeom>
+          <a:noFill/>
+          <a:ln/>
+        </p:spPr>
+        <p:txBody>
+          <a:bodyPr wrap="square" rtlCol="0" anchor="ctr"/>
+          <a:lstStyle/>
+          <a:p>
+            <a:pPr indent="0" marL="0">
+              <a:buNone/>
+            </a:pPr>
+            <a:r>
+              <a:rPr lang="en-US" sz="1150" b="1" dirty="0">
+                <a:solidFill>
+                  <a:srgbClr val="3E8E5A"/>
+                </a:solidFill>
+              </a:rPr>
+              <a:t>No exceptions found in any daily comparison — both corrections are ready to feed the full forecasting rebuild.</a:t>
+            </a:r>
+            <a:endParaRPr lang="en-US" sz="1150" dirty="0"/>
+          </a:p>
+        </p:txBody>
+      </p:sp>
+      <p:sp>
+        <p:nvSpPr>
+          <p:cNvPr id="14" name="Text 11"/>
           <p:cNvSpPr/>
           <p:nvPr/>
         </p:nvSpPr>
@@ -3996,7 +4117,7 @@
       </p:sp>
       <p:sp>
         <p:nvSpPr>
-          <p:cNvPr id="23" name="Text 21"/>
+          <p:cNvPr id="15" name="Text 12"/>
           <p:cNvSpPr/>
           <p:nvPr/>
         </p:nvSpPr>
@@ -4088,6 +4209,759 @@
                 <a:ea typeface="Calibri" pitchFamily="34" charset="-122"/>
                 <a:cs typeface="Calibri" pitchFamily="34" charset="-120"/>
               </a:rPr>
+              <a:t>DATA DISCOVERY</a:t>
+            </a:r>
+            <a:endParaRPr lang="en-US" sz="1200" dirty="0"/>
+          </a:p>
+        </p:txBody>
+      </p:sp>
+      <p:sp>
+        <p:nvSpPr>
+          <p:cNvPr id="3" name="Text 1"/>
+          <p:cNvSpPr/>
+          <p:nvPr/>
+        </p:nvSpPr>
+        <p:spPr>
+          <a:xfrm>
+            <a:off x="548640" y="594360"/>
+            <a:ext cx="10515600" cy="640080"/>
+          </a:xfrm>
+          <a:prstGeom prst="rect">
+            <a:avLst/>
+          </a:prstGeom>
+          <a:noFill/>
+          <a:ln/>
+        </p:spPr>
+        <p:txBody>
+          <a:bodyPr wrap="square" rtlCol="0" anchor="ctr"/>
+          <a:lstStyle/>
+          <a:p>
+            <a:pPr indent="0" marL="0">
+              <a:buNone/>
+            </a:pPr>
+            <a:r>
+              <a:rPr lang="en-US" sz="2800" b="1" dirty="0">
+                <a:solidFill>
+                  <a:srgbClr val="1A3A5C"/>
+                </a:solidFill>
+                <a:latin typeface="Calibri" pitchFamily="34" charset="0"/>
+                <a:ea typeface="Calibri" pitchFamily="34" charset="-122"/>
+                <a:cs typeface="Calibri" pitchFamily="34" charset="-120"/>
+              </a:rPr>
+              <a:t>Alberta Queue Data Has a Timeline Gap</a:t>
+            </a:r>
+            <a:endParaRPr lang="en-US" sz="2800" dirty="0"/>
+          </a:p>
+        </p:txBody>
+      </p:sp>
+      <p:sp>
+        <p:nvSpPr>
+          <p:cNvPr id="4" name="Text 2"/>
+          <p:cNvSpPr/>
+          <p:nvPr/>
+        </p:nvSpPr>
+        <p:spPr>
+          <a:xfrm>
+            <a:off x="548640" y="1417320"/>
+            <a:ext cx="10789920" cy="365760"/>
+          </a:xfrm>
+          <a:prstGeom prst="rect">
+            <a:avLst/>
+          </a:prstGeom>
+          <a:noFill/>
+          <a:ln/>
+        </p:spPr>
+        <p:txBody>
+          <a:bodyPr wrap="square" rtlCol="0" anchor="ctr"/>
+          <a:lstStyle/>
+          <a:p>
+            <a:pPr indent="0" marL="0">
+              <a:buNone/>
+            </a:pPr>
+            <a:r>
+              <a:rPr lang="en-US" sz="1300" dirty="0">
+                <a:solidFill>
+                  <a:srgbClr val="444444"/>
+                </a:solidFill>
+              </a:rPr>
+              <a:t>Investigating the Texas/Alberta split surfaced a data-availability issue, not a query bug:</a:t>
+            </a:r>
+            <a:endParaRPr lang="en-US" sz="1300" dirty="0"/>
+          </a:p>
+        </p:txBody>
+      </p:sp>
+      <p:sp>
+        <p:nvSpPr>
+          <p:cNvPr id="5" name="Shape 3"/>
+          <p:cNvSpPr/>
+          <p:nvPr/>
+        </p:nvSpPr>
+        <p:spPr>
+          <a:xfrm>
+            <a:off x="914400" y="2286000"/>
+            <a:ext cx="9875520" cy="0"/>
+          </a:xfrm>
+          <a:prstGeom prst="line">
+            <a:avLst/>
+          </a:prstGeom>
+          <a:noFill/>
+          <a:ln w="38100">
+            <a:solidFill>
+              <a:srgbClr val="D0D5D9"/>
+            </a:solidFill>
+            <a:prstDash val="solid"/>
+          </a:ln>
+        </p:spPr>
+      </p:sp>
+      <p:sp>
+        <p:nvSpPr>
+          <p:cNvPr id="6" name="Shape 4"/>
+          <p:cNvSpPr/>
+          <p:nvPr/>
+        </p:nvSpPr>
+        <p:spPr>
+          <a:xfrm>
+            <a:off x="832104" y="2203704"/>
+            <a:ext cx="164592" cy="164592"/>
+          </a:xfrm>
+          <a:prstGeom prst="ellipse">
+            <a:avLst/>
+          </a:prstGeom>
+          <a:solidFill>
+            <a:srgbClr val="B0B7BD"/>
+          </a:solidFill>
+          <a:ln/>
+        </p:spPr>
+      </p:sp>
+      <p:sp>
+        <p:nvSpPr>
+          <p:cNvPr id="7" name="Text 5"/>
+          <p:cNvSpPr/>
+          <p:nvPr/>
+        </p:nvSpPr>
+        <p:spPr>
+          <a:xfrm>
+            <a:off x="91440" y="2423160"/>
+            <a:ext cx="1645920" cy="274320"/>
+          </a:xfrm>
+          <a:prstGeom prst="rect">
+            <a:avLst/>
+          </a:prstGeom>
+          <a:noFill/>
+          <a:ln/>
+        </p:spPr>
+        <p:txBody>
+          <a:bodyPr wrap="square" rtlCol="0" anchor="ctr"/>
+          <a:lstStyle/>
+          <a:p>
+            <a:pPr algn="ctr" indent="0" marL="0">
+              <a:buNone/>
+            </a:pPr>
+            <a:r>
+              <a:rPr lang="en-US" sz="1200" b="1" dirty="0">
+                <a:solidFill>
+                  <a:srgbClr val="1A3A5C"/>
+                </a:solidFill>
+              </a:rPr>
+              <a:t>Jul 2022</a:t>
+            </a:r>
+            <a:endParaRPr lang="en-US" sz="1200" dirty="0"/>
+          </a:p>
+        </p:txBody>
+      </p:sp>
+      <p:sp>
+        <p:nvSpPr>
+          <p:cNvPr id="8" name="Text 6"/>
+          <p:cNvSpPr/>
+          <p:nvPr/>
+        </p:nvSpPr>
+        <p:spPr>
+          <a:xfrm>
+            <a:off x="91440" y="2724912"/>
+            <a:ext cx="1645920" cy="548640"/>
+          </a:xfrm>
+          <a:prstGeom prst="rect">
+            <a:avLst/>
+          </a:prstGeom>
+          <a:noFill/>
+          <a:ln/>
+        </p:spPr>
+        <p:txBody>
+          <a:bodyPr wrap="square" rtlCol="0" anchor="ctr"/>
+          <a:lstStyle/>
+          <a:p>
+            <a:pPr algn="ctr" indent="0" marL="0">
+              <a:buNone/>
+            </a:pPr>
+            <a:r>
+              <a:rPr lang="en-US" sz="1000" dirty="0">
+                <a:solidFill>
+                  <a:srgbClr val="444444"/>
+                </a:solidFill>
+              </a:rPr>
+              <a:t>Baseline dataset</a:t>
+            </a:r>
+            <a:endParaRPr lang="en-US" sz="1000" dirty="0"/>
+          </a:p>
+          <a:p>
+            <a:pPr algn="ctr" indent="0" marL="0">
+              <a:buNone/>
+            </a:pPr>
+            <a:r>
+              <a:rPr lang="en-US" sz="1000" dirty="0">
+                <a:solidFill>
+                  <a:srgbClr val="444444"/>
+                </a:solidFill>
+              </a:rPr>
+              <a:t>starts</a:t>
+            </a:r>
+            <a:endParaRPr lang="en-US" sz="1000" dirty="0"/>
+          </a:p>
+        </p:txBody>
+      </p:sp>
+      <p:sp>
+        <p:nvSpPr>
+          <p:cNvPr id="9" name="Shape 7"/>
+          <p:cNvSpPr/>
+          <p:nvPr/>
+        </p:nvSpPr>
+        <p:spPr>
+          <a:xfrm>
+            <a:off x="5769864" y="2203704"/>
+            <a:ext cx="164592" cy="164592"/>
+          </a:xfrm>
+          <a:prstGeom prst="ellipse">
+            <a:avLst/>
+          </a:prstGeom>
+          <a:solidFill>
+            <a:srgbClr val="3D8B8B"/>
+          </a:solidFill>
+          <a:ln/>
+        </p:spPr>
+      </p:sp>
+      <p:sp>
+        <p:nvSpPr>
+          <p:cNvPr id="10" name="Text 8"/>
+          <p:cNvSpPr/>
+          <p:nvPr/>
+        </p:nvSpPr>
+        <p:spPr>
+          <a:xfrm>
+            <a:off x="5029200" y="2423160"/>
+            <a:ext cx="1645920" cy="274320"/>
+          </a:xfrm>
+          <a:prstGeom prst="rect">
+            <a:avLst/>
+          </a:prstGeom>
+          <a:noFill/>
+          <a:ln/>
+        </p:spPr>
+        <p:txBody>
+          <a:bodyPr wrap="square" rtlCol="0" anchor="ctr"/>
+          <a:lstStyle/>
+          <a:p>
+            <a:pPr algn="ctr" indent="0" marL="0">
+              <a:buNone/>
+            </a:pPr>
+            <a:r>
+              <a:rPr lang="en-US" sz="1200" b="1" dirty="0">
+                <a:solidFill>
+                  <a:srgbClr val="1A3A5C"/>
+                </a:solidFill>
+              </a:rPr>
+              <a:t>Mar 2024</a:t>
+            </a:r>
+            <a:endParaRPr lang="en-US" sz="1200" dirty="0"/>
+          </a:p>
+        </p:txBody>
+      </p:sp>
+      <p:sp>
+        <p:nvSpPr>
+          <p:cNvPr id="11" name="Text 9"/>
+          <p:cNvSpPr/>
+          <p:nvPr/>
+        </p:nvSpPr>
+        <p:spPr>
+          <a:xfrm>
+            <a:off x="5029200" y="2724912"/>
+            <a:ext cx="1645920" cy="548640"/>
+          </a:xfrm>
+          <a:prstGeom prst="rect">
+            <a:avLst/>
+          </a:prstGeom>
+          <a:noFill/>
+          <a:ln/>
+        </p:spPr>
+        <p:txBody>
+          <a:bodyPr wrap="square" rtlCol="0" anchor="ctr"/>
+          <a:lstStyle/>
+          <a:p>
+            <a:pPr algn="ctr" indent="0" marL="0">
+              <a:buNone/>
+            </a:pPr>
+            <a:r>
+              <a:rPr lang="en-US" sz="1000" dirty="0">
+                <a:solidFill>
+                  <a:srgbClr val="444444"/>
+                </a:solidFill>
+              </a:rPr>
+              <a:t>Alberta billing</a:t>
+            </a:r>
+            <a:endParaRPr lang="en-US" sz="1000" dirty="0"/>
+          </a:p>
+          <a:p>
+            <a:pPr algn="ctr" indent="0" marL="0">
+              <a:buNone/>
+            </a:pPr>
+            <a:r>
+              <a:rPr lang="en-US" sz="1000" dirty="0">
+                <a:solidFill>
+                  <a:srgbClr val="444444"/>
+                </a:solidFill>
+              </a:rPr>
+              <a:t>queues go live</a:t>
+            </a:r>
+            <a:endParaRPr lang="en-US" sz="1000" dirty="0"/>
+          </a:p>
+        </p:txBody>
+      </p:sp>
+      <p:sp>
+        <p:nvSpPr>
+          <p:cNvPr id="12" name="Shape 10"/>
+          <p:cNvSpPr/>
+          <p:nvPr/>
+        </p:nvSpPr>
+        <p:spPr>
+          <a:xfrm>
+            <a:off x="10707624" y="2203704"/>
+            <a:ext cx="164592" cy="164592"/>
+          </a:xfrm>
+          <a:prstGeom prst="ellipse">
+            <a:avLst/>
+          </a:prstGeom>
+          <a:solidFill>
+            <a:srgbClr val="1A3A5C"/>
+          </a:solidFill>
+          <a:ln/>
+        </p:spPr>
+      </p:sp>
+      <p:sp>
+        <p:nvSpPr>
+          <p:cNvPr id="13" name="Text 11"/>
+          <p:cNvSpPr/>
+          <p:nvPr/>
+        </p:nvSpPr>
+        <p:spPr>
+          <a:xfrm>
+            <a:off x="9966960" y="2423160"/>
+            <a:ext cx="1645920" cy="274320"/>
+          </a:xfrm>
+          <a:prstGeom prst="rect">
+            <a:avLst/>
+          </a:prstGeom>
+          <a:noFill/>
+          <a:ln/>
+        </p:spPr>
+        <p:txBody>
+          <a:bodyPr wrap="square" rtlCol="0" anchor="ctr"/>
+          <a:lstStyle/>
+          <a:p>
+            <a:pPr algn="ctr" indent="0" marL="0">
+              <a:buNone/>
+            </a:pPr>
+            <a:r>
+              <a:rPr lang="en-US" sz="1200" b="1" dirty="0">
+                <a:solidFill>
+                  <a:srgbClr val="1A3A5C"/>
+                </a:solidFill>
+              </a:rPr>
+              <a:t>Jul 2026</a:t>
+            </a:r>
+            <a:endParaRPr lang="en-US" sz="1200" dirty="0"/>
+          </a:p>
+        </p:txBody>
+      </p:sp>
+      <p:sp>
+        <p:nvSpPr>
+          <p:cNvPr id="14" name="Text 12"/>
+          <p:cNvSpPr/>
+          <p:nvPr/>
+        </p:nvSpPr>
+        <p:spPr>
+          <a:xfrm>
+            <a:off x="9966960" y="2724912"/>
+            <a:ext cx="1645920" cy="548640"/>
+          </a:xfrm>
+          <a:prstGeom prst="rect">
+            <a:avLst/>
+          </a:prstGeom>
+          <a:noFill/>
+          <a:ln/>
+        </p:spPr>
+        <p:txBody>
+          <a:bodyPr wrap="square" rtlCol="0" anchor="ctr"/>
+          <a:lstStyle/>
+          <a:p>
+            <a:pPr algn="ctr" indent="0" marL="0">
+              <a:buNone/>
+            </a:pPr>
+            <a:r>
+              <a:rPr lang="en-US" sz="1000" dirty="0">
+                <a:solidFill>
+                  <a:srgbClr val="444444"/>
+                </a:solidFill>
+              </a:rPr>
+              <a:t>Present</a:t>
+            </a:r>
+            <a:endParaRPr lang="en-US" sz="1000" dirty="0"/>
+          </a:p>
+        </p:txBody>
+      </p:sp>
+      <p:sp>
+        <p:nvSpPr>
+          <p:cNvPr id="15" name="Shape 13"/>
+          <p:cNvSpPr/>
+          <p:nvPr/>
+        </p:nvSpPr>
+        <p:spPr>
+          <a:xfrm>
+            <a:off x="914400" y="1783080"/>
+            <a:ext cx="4937760" cy="365760"/>
+          </a:xfrm>
+          <a:prstGeom prst="roundRect">
+            <a:avLst>
+              <a:gd name="adj" fmla="val 10000"/>
+            </a:avLst>
+          </a:prstGeom>
+          <a:solidFill>
+            <a:srgbClr val="F0DDC7"/>
+          </a:solidFill>
+          <a:ln/>
+        </p:spPr>
+      </p:sp>
+      <p:sp>
+        <p:nvSpPr>
+          <p:cNvPr id="16" name="Text 14"/>
+          <p:cNvSpPr/>
+          <p:nvPr/>
+        </p:nvSpPr>
+        <p:spPr>
+          <a:xfrm>
+            <a:off x="914400" y="1801368"/>
+            <a:ext cx="4937760" cy="329184"/>
+          </a:xfrm>
+          <a:prstGeom prst="rect">
+            <a:avLst/>
+          </a:prstGeom>
+          <a:noFill/>
+          <a:ln/>
+        </p:spPr>
+        <p:txBody>
+          <a:bodyPr wrap="square" rtlCol="0" anchor="ctr"/>
+          <a:lstStyle/>
+          <a:p>
+            <a:pPr algn="ctr" indent="0" marL="0">
+              <a:buNone/>
+            </a:pPr>
+            <a:r>
+              <a:rPr lang="en-US" sz="1000" b="1" dirty="0">
+                <a:solidFill>
+                  <a:srgbClr val="B8860B"/>
+                </a:solidFill>
+              </a:rPr>
+              <a:t>No Alberta queue activity in this window</a:t>
+            </a:r>
+            <a:endParaRPr lang="en-US" sz="1000" dirty="0"/>
+          </a:p>
+        </p:txBody>
+      </p:sp>
+      <p:sp>
+        <p:nvSpPr>
+          <p:cNvPr id="17" name="Shape 15"/>
+          <p:cNvSpPr/>
+          <p:nvPr/>
+        </p:nvSpPr>
+        <p:spPr>
+          <a:xfrm>
+            <a:off x="548640" y="3749040"/>
+            <a:ext cx="10881360" cy="1417320"/>
+          </a:xfrm>
+          <a:prstGeom prst="roundRect">
+            <a:avLst>
+              <a:gd name="adj" fmla="val 5161"/>
+            </a:avLst>
+          </a:prstGeom>
+          <a:solidFill>
+            <a:srgbClr val="F5F6F7"/>
+          </a:solidFill>
+          <a:ln w="12700">
+            <a:solidFill>
+              <a:srgbClr val="E3E6E9"/>
+            </a:solidFill>
+            <a:prstDash val="solid"/>
+          </a:ln>
+        </p:spPr>
+      </p:sp>
+      <p:sp>
+        <p:nvSpPr>
+          <p:cNvPr id="18" name="Text 16"/>
+          <p:cNvSpPr/>
+          <p:nvPr/>
+        </p:nvSpPr>
+        <p:spPr>
+          <a:xfrm>
+            <a:off x="822960" y="3886200"/>
+            <a:ext cx="10332720" cy="320040"/>
+          </a:xfrm>
+          <a:prstGeom prst="rect">
+            <a:avLst/>
+          </a:prstGeom>
+          <a:noFill/>
+          <a:ln/>
+        </p:spPr>
+        <p:txBody>
+          <a:bodyPr wrap="square" rtlCol="0" anchor="ctr"/>
+          <a:lstStyle/>
+          <a:p>
+            <a:pPr indent="0" marL="0">
+              <a:buNone/>
+            </a:pPr>
+            <a:r>
+              <a:rPr lang="en-US" sz="1350" b="1" dirty="0">
+                <a:solidFill>
+                  <a:srgbClr val="1A3A5C"/>
+                </a:solidFill>
+              </a:rPr>
+              <a:t>What this means for the dataset</a:t>
+            </a:r>
+            <a:endParaRPr lang="en-US" sz="1350" dirty="0"/>
+          </a:p>
+        </p:txBody>
+      </p:sp>
+      <p:sp>
+        <p:nvSpPr>
+          <p:cNvPr id="19" name="Text 17"/>
+          <p:cNvSpPr/>
+          <p:nvPr/>
+        </p:nvSpPr>
+        <p:spPr>
+          <a:xfrm>
+            <a:off x="822960" y="4206240"/>
+            <a:ext cx="10332720" cy="868680"/>
+          </a:xfrm>
+          <a:prstGeom prst="rect">
+            <a:avLst/>
+          </a:prstGeom>
+          <a:noFill/>
+          <a:ln/>
+        </p:spPr>
+        <p:txBody>
+          <a:bodyPr wrap="square" rtlCol="0" anchor="ctr"/>
+          <a:lstStyle/>
+          <a:p>
+            <a:pPr indent="0" marL="0">
+              <a:buNone/>
+            </a:pPr>
+            <a:r>
+              <a:rPr lang="en-US" sz="1200" dirty="0">
+                <a:solidFill>
+                  <a:srgbClr val="444444"/>
+                </a:solidFill>
+              </a:rPr>
+              <a:t>Alberta shows zero Care calls from July 2022–March 2024 because the queue data doesn't exist yet — not because Alberta had no volume. The corrected query now carries an explicit AlbertaDataAvailability flag so this isn't mistaken for a real market signal.</a:t>
+            </a:r>
+            <a:endParaRPr lang="en-US" sz="1200" dirty="0"/>
+          </a:p>
+        </p:txBody>
+      </p:sp>
+      <p:sp>
+        <p:nvSpPr>
+          <p:cNvPr id="20" name="Shape 18"/>
+          <p:cNvSpPr/>
+          <p:nvPr/>
+        </p:nvSpPr>
+        <p:spPr>
+          <a:xfrm>
+            <a:off x="548640" y="5349240"/>
+            <a:ext cx="10881360" cy="914400"/>
+          </a:xfrm>
+          <a:prstGeom prst="roundRect">
+            <a:avLst>
+              <a:gd name="adj" fmla="val 8000"/>
+            </a:avLst>
+          </a:prstGeom>
+          <a:solidFill>
+            <a:srgbClr val="FCEFDD"/>
+          </a:solidFill>
+          <a:ln/>
+        </p:spPr>
+      </p:sp>
+      <p:sp>
+        <p:nvSpPr>
+          <p:cNvPr id="21" name="Text 19"/>
+          <p:cNvSpPr/>
+          <p:nvPr/>
+        </p:nvSpPr>
+        <p:spPr>
+          <a:xfrm>
+            <a:off x="822960" y="5440680"/>
+            <a:ext cx="10332720" cy="731520"/>
+          </a:xfrm>
+          <a:prstGeom prst="rect">
+            <a:avLst/>
+          </a:prstGeom>
+          <a:noFill/>
+          <a:ln/>
+        </p:spPr>
+        <p:txBody>
+          <a:bodyPr wrap="square" rtlCol="0" anchor="ctr"/>
+          <a:lstStyle/>
+          <a:p>
+            <a:pPr indent="0" marL="0">
+              <a:buNone/>
+            </a:pPr>
+            <a:r>
+              <a:rPr lang="en-US" sz="1200" b="1" dirty="0">
+                <a:solidFill>
+                  <a:srgbClr val="B8860B"/>
+                </a:solidFill>
+              </a:rPr>
+              <a:t>Open question for Jonathan: was Alberta a new market/product launch in 2024, or did it exist earlier under a different queue naming convention this table doesn't capture?</a:t>
+            </a:r>
+            <a:endParaRPr lang="en-US" sz="1200" dirty="0"/>
+          </a:p>
+        </p:txBody>
+      </p:sp>
+      <p:sp>
+        <p:nvSpPr>
+          <p:cNvPr id="22" name="Text 20"/>
+          <p:cNvSpPr/>
+          <p:nvPr/>
+        </p:nvSpPr>
+        <p:spPr>
+          <a:xfrm>
+            <a:off x="548640" y="6492240"/>
+            <a:ext cx="8229600" cy="274320"/>
+          </a:xfrm>
+          <a:prstGeom prst="rect">
+            <a:avLst/>
+          </a:prstGeom>
+          <a:noFill/>
+          <a:ln/>
+        </p:spPr>
+        <p:txBody>
+          <a:bodyPr wrap="square" rtlCol="0" anchor="ctr"/>
+          <a:lstStyle/>
+          <a:p>
+            <a:pPr indent="0" marL="0">
+              <a:buNone/>
+            </a:pPr>
+            <a:r>
+              <a:rPr lang="en-US" sz="900" dirty="0">
+                <a:solidFill>
+                  <a:srgbClr val="999999"/>
+                </a:solidFill>
+              </a:rPr>
+              <a:t>Task 4 — Baseline Forecasting Dataset  |  Corrections Complete</a:t>
+            </a:r>
+            <a:endParaRPr lang="en-US" sz="900" dirty="0"/>
+          </a:p>
+        </p:txBody>
+      </p:sp>
+      <p:sp>
+        <p:nvSpPr>
+          <p:cNvPr id="23" name="Text 21"/>
+          <p:cNvSpPr/>
+          <p:nvPr/>
+        </p:nvSpPr>
+        <p:spPr>
+          <a:xfrm>
+            <a:off x="11521440" y="6492240"/>
+            <a:ext cx="457200" cy="274320"/>
+          </a:xfrm>
+          <a:prstGeom prst="rect">
+            <a:avLst/>
+          </a:prstGeom>
+          <a:noFill/>
+          <a:ln/>
+        </p:spPr>
+        <p:txBody>
+          <a:bodyPr wrap="square" rtlCol="0" anchor="ctr"/>
+          <a:lstStyle/>
+          <a:p>
+            <a:pPr algn="r" indent="0" marL="0">
+              <a:buNone/>
+            </a:pPr>
+            <a:r>
+              <a:rPr lang="en-US" sz="900" dirty="0">
+                <a:solidFill>
+                  <a:srgbClr val="999999"/>
+                </a:solidFill>
+              </a:rPr>
+              <a:t>5</a:t>
+            </a:r>
+            <a:endParaRPr lang="en-US" sz="900" dirty="0"/>
+          </a:p>
+        </p:txBody>
+      </p:sp>
+    </p:spTree>
+  </p:cSld>
+  <p:clrMapOvr>
+    <a:masterClrMapping/>
+  </p:clrMapOvr>
+</p:sld>
+</file>
+
+<file path=ppt/slides/slide6.xml><?xml version="1.0" encoding="utf-8"?>
+<p:sld xmlns:a="http://schemas.openxmlformats.org/drawingml/2006/main" xmlns:r="http://schemas.openxmlformats.org/officeDocument/2006/relationships" xmlns:p="http://schemas.openxmlformats.org/presentationml/2006/main">
+  <p:cSld name="Slide 6">
+    <p:spTree>
+      <p:nvGrpSpPr>
+        <p:cNvPr id="1" name=""/>
+        <p:cNvGrpSpPr/>
+        <p:nvPr/>
+      </p:nvGrpSpPr>
+      <p:grpSpPr>
+        <a:xfrm>
+          <a:off x="0" y="0"/>
+          <a:ext cx="0" cy="0"/>
+          <a:chOff x="0" y="0"/>
+          <a:chExt cx="0" cy="0"/>
+        </a:xfrm>
+      </p:grpSpPr>
+      <p:sp>
+        <p:nvSpPr>
+          <p:cNvPr id="2" name="Text 0"/>
+          <p:cNvSpPr/>
+          <p:nvPr/>
+        </p:nvSpPr>
+        <p:spPr>
+          <a:xfrm>
+            <a:off x="548640" y="320040"/>
+            <a:ext cx="7315200" cy="320040"/>
+          </a:xfrm>
+          <a:prstGeom prst="rect">
+            <a:avLst/>
+          </a:prstGeom>
+          <a:noFill/>
+          <a:ln/>
+        </p:spPr>
+        <p:txBody>
+          <a:bodyPr wrap="square" rtlCol="0" anchor="ctr"/>
+          <a:lstStyle/>
+          <a:p>
+            <a:pPr indent="0" marL="0">
+              <a:buNone/>
+            </a:pPr>
+            <a:r>
+              <a:rPr lang="en-US" sz="1200" b="1" spc="100" kern="0" dirty="0">
+                <a:solidFill>
+                  <a:srgbClr val="2C5F8A"/>
+                </a:solidFill>
+                <a:latin typeface="Calibri" pitchFamily="34" charset="0"/>
+                <a:ea typeface="Calibri" pitchFamily="34" charset="-122"/>
+                <a:cs typeface="Calibri" pitchFamily="34" charset="-120"/>
+              </a:rPr>
               <a:t>FINDINGS &amp; NEXT STEPS</a:t>
             </a:r>
             <a:endParaRPr lang="en-US" sz="1200" dirty="0"/>
@@ -4612,7 +5486,7 @@
                   <a:srgbClr val="999999"/>
                 </a:solidFill>
               </a:rPr>
-              <a:t>5</a:t>
+              <a:t>6</a:t>
             </a:r>
             <a:endParaRPr lang="en-US" sz="900" dirty="0"/>
           </a:p>
